--- a/knf/decks/d2p6.pptx
+++ b/knf/decks/d2p6.pptx
@@ -5506,7 +5506,7 @@
                 <a:ea typeface="Pretendard"/>
                 <a:cs typeface="Pretendard"/>
               </a:rPr>
-              <a:t>45분 뒤에는</a:t>
+              <a:t>50분 뒤에는</a:t>
             </a:r>
           </a:p>
         </p:txBody>

--- a/knf/decks/d2p6.pptx
+++ b/knf/decks/d2p6.pptx
@@ -3100,7 +3100,7 @@
       <p:grpSpPr/>
       <p:sp>
         <p:nvSpPr>
-          <p:cNvPr id="2" name="Oval 1"/>
+          <p:cNvPr id="2" name="deckgen:decor"/>
           <p:cNvSpPr/>
           <p:nvPr/>
         </p:nvSpPr>
@@ -3130,7 +3130,7 @@
       </p:sp>
       <p:sp>
         <p:nvSpPr>
-          <p:cNvPr id="3" name="Oval 2"/>
+          <p:cNvPr id="3" name="deckgen:decor"/>
           <p:cNvSpPr/>
           <p:nvPr/>
         </p:nvSpPr>
@@ -3160,7 +3160,7 @@
       </p:sp>
       <p:sp>
         <p:nvSpPr>
-          <p:cNvPr id="4" name="Oval 3"/>
+          <p:cNvPr id="4" name="deckgen:decor"/>
           <p:cNvSpPr/>
           <p:nvPr/>
         </p:nvSpPr>
@@ -3190,7 +3190,7 @@
       </p:sp>
       <p:sp>
         <p:nvSpPr>
-          <p:cNvPr id="5" name="Rectangle 4"/>
+          <p:cNvPr id="5" name="deckgen:decor"/>
           <p:cNvSpPr/>
           <p:nvPr/>
         </p:nvSpPr>
@@ -3220,7 +3220,7 @@
       </p:sp>
       <p:sp>
         <p:nvSpPr>
-          <p:cNvPr id="6" name="Oval 5"/>
+          <p:cNvPr id="6" name="deckgen:decor"/>
           <p:cNvSpPr/>
           <p:nvPr/>
         </p:nvSpPr>
@@ -3250,7 +3250,7 @@
       </p:sp>
       <p:sp>
         <p:nvSpPr>
-          <p:cNvPr id="7" name="Oval 6"/>
+          <p:cNvPr id="7" name="deckgen:decor"/>
           <p:cNvSpPr/>
           <p:nvPr/>
         </p:nvSpPr>
@@ -3280,7 +3280,7 @@
       </p:sp>
       <p:sp>
         <p:nvSpPr>
-          <p:cNvPr id="8" name="Oval 7"/>
+          <p:cNvPr id="8" name="deckgen:decor"/>
           <p:cNvSpPr/>
           <p:nvPr/>
         </p:nvSpPr>
@@ -3310,7 +3310,7 @@
       </p:sp>
       <p:sp>
         <p:nvSpPr>
-          <p:cNvPr id="9" name="Oval 8"/>
+          <p:cNvPr id="9" name="deckgen:decor"/>
           <p:cNvSpPr/>
           <p:nvPr/>
         </p:nvSpPr>
@@ -3340,7 +3340,7 @@
       </p:sp>
       <p:sp>
         <p:nvSpPr>
-          <p:cNvPr id="10" name="Rectangle 9"/>
+          <p:cNvPr id="10" name="deckgen:decor"/>
           <p:cNvSpPr/>
           <p:nvPr/>
         </p:nvSpPr>
@@ -3618,7 +3618,7 @@
       <p:grpSpPr/>
       <p:sp>
         <p:nvSpPr>
-          <p:cNvPr id="2" name="Oval 1"/>
+          <p:cNvPr id="2" name="deckgen:decor"/>
           <p:cNvSpPr/>
           <p:nvPr/>
         </p:nvSpPr>
@@ -3648,7 +3648,7 @@
       </p:sp>
       <p:sp>
         <p:nvSpPr>
-          <p:cNvPr id="3" name="Oval 2"/>
+          <p:cNvPr id="3" name="deckgen:decor"/>
           <p:cNvSpPr/>
           <p:nvPr/>
         </p:nvSpPr>
@@ -3678,7 +3678,7 @@
       </p:sp>
       <p:sp>
         <p:nvSpPr>
-          <p:cNvPr id="4" name="Oval 3"/>
+          <p:cNvPr id="4" name="deckgen:decor"/>
           <p:cNvSpPr/>
           <p:nvPr/>
         </p:nvSpPr>
@@ -4534,7 +4534,7 @@
       <p:grpSpPr/>
       <p:sp>
         <p:nvSpPr>
-          <p:cNvPr id="2" name="Oval 1"/>
+          <p:cNvPr id="2" name="deckgen:decor"/>
           <p:cNvSpPr/>
           <p:nvPr/>
         </p:nvSpPr>
@@ -4564,7 +4564,7 @@
       </p:sp>
       <p:sp>
         <p:nvSpPr>
-          <p:cNvPr id="3" name="Oval 2"/>
+          <p:cNvPr id="3" name="deckgen:decor"/>
           <p:cNvSpPr/>
           <p:nvPr/>
         </p:nvSpPr>
@@ -5341,7 +5341,7 @@
       <p:grpSpPr/>
       <p:sp>
         <p:nvSpPr>
-          <p:cNvPr id="2" name="Oval 1"/>
+          <p:cNvPr id="2" name="deckgen:decor"/>
           <p:cNvSpPr/>
           <p:nvPr/>
         </p:nvSpPr>
@@ -5371,7 +5371,7 @@
       </p:sp>
       <p:sp>
         <p:nvSpPr>
-          <p:cNvPr id="3" name="Oval 2"/>
+          <p:cNvPr id="3" name="deckgen:decor"/>
           <p:cNvSpPr/>
           <p:nvPr/>
         </p:nvSpPr>
@@ -5401,7 +5401,7 @@
       </p:sp>
       <p:sp>
         <p:nvSpPr>
-          <p:cNvPr id="4" name="Oval 3"/>
+          <p:cNvPr id="4" name="deckgen:decor"/>
           <p:cNvSpPr/>
           <p:nvPr/>
         </p:nvSpPr>
@@ -6186,7 +6186,7 @@
       <p:grpSpPr/>
       <p:sp>
         <p:nvSpPr>
-          <p:cNvPr id="2" name="Oval 1"/>
+          <p:cNvPr id="2" name="deckgen:decor"/>
           <p:cNvSpPr/>
           <p:nvPr/>
         </p:nvSpPr>
@@ -6216,7 +6216,7 @@
       </p:sp>
       <p:sp>
         <p:nvSpPr>
-          <p:cNvPr id="3" name="Oval 2"/>
+          <p:cNvPr id="3" name="deckgen:decor"/>
           <p:cNvSpPr/>
           <p:nvPr/>
         </p:nvSpPr>
@@ -6246,7 +6246,7 @@
       </p:sp>
       <p:sp>
         <p:nvSpPr>
-          <p:cNvPr id="4" name="Oval 3"/>
+          <p:cNvPr id="4" name="deckgen:decor"/>
           <p:cNvSpPr/>
           <p:nvPr/>
         </p:nvSpPr>
@@ -6452,7 +6452,7 @@
       </p:sp>
       <p:sp>
         <p:nvSpPr>
-          <p:cNvPr id="10" name="TextBox 9"/>
+          <p:cNvPr id="10" name="deckgen:ornament"/>
           <p:cNvSpPr txBox="1"/>
           <p:nvPr/>
         </p:nvSpPr>
@@ -6637,7 +6637,7 @@
       </p:sp>
       <p:sp>
         <p:nvSpPr>
-          <p:cNvPr id="14" name="TextBox 13"/>
+          <p:cNvPr id="14" name="deckgen:ornament"/>
           <p:cNvSpPr txBox="1"/>
           <p:nvPr/>
         </p:nvSpPr>
@@ -6822,7 +6822,7 @@
       </p:sp>
       <p:sp>
         <p:nvSpPr>
-          <p:cNvPr id="18" name="TextBox 17"/>
+          <p:cNvPr id="18" name="deckgen:ornament"/>
           <p:cNvSpPr txBox="1"/>
           <p:nvPr/>
         </p:nvSpPr>
@@ -7144,7 +7144,7 @@
       <p:grpSpPr/>
       <p:sp>
         <p:nvSpPr>
-          <p:cNvPr id="2" name="Oval 1"/>
+          <p:cNvPr id="2" name="deckgen:decor"/>
           <p:cNvSpPr/>
           <p:nvPr/>
         </p:nvSpPr>
@@ -7174,7 +7174,7 @@
       </p:sp>
       <p:sp>
         <p:nvSpPr>
-          <p:cNvPr id="3" name="Oval 2"/>
+          <p:cNvPr id="3" name="deckgen:decor"/>
           <p:cNvSpPr/>
           <p:nvPr/>
         </p:nvSpPr>
@@ -7204,7 +7204,7 @@
       </p:sp>
       <p:sp>
         <p:nvSpPr>
-          <p:cNvPr id="4" name="Oval 3"/>
+          <p:cNvPr id="4" name="deckgen:decor"/>
           <p:cNvSpPr/>
           <p:nvPr/>
         </p:nvSpPr>
@@ -8337,7 +8337,7 @@
       <p:grpSpPr/>
       <p:sp>
         <p:nvSpPr>
-          <p:cNvPr id="2" name="Oval 1"/>
+          <p:cNvPr id="2" name="deckgen:decor"/>
           <p:cNvSpPr/>
           <p:nvPr/>
         </p:nvSpPr>
@@ -8367,7 +8367,7 @@
       </p:sp>
       <p:sp>
         <p:nvSpPr>
-          <p:cNvPr id="3" name="Oval 2"/>
+          <p:cNvPr id="3" name="deckgen:decor"/>
           <p:cNvSpPr/>
           <p:nvPr/>
         </p:nvSpPr>
@@ -8397,7 +8397,7 @@
       </p:sp>
       <p:sp>
         <p:nvSpPr>
-          <p:cNvPr id="4" name="Oval 3"/>
+          <p:cNvPr id="4" name="deckgen:decor"/>
           <p:cNvSpPr/>
           <p:nvPr/>
         </p:nvSpPr>
@@ -9598,7 +9598,7 @@
       <p:grpSpPr/>
       <p:sp>
         <p:nvSpPr>
-          <p:cNvPr id="2" name="Oval 1"/>
+          <p:cNvPr id="2" name="deckgen:decor"/>
           <p:cNvSpPr/>
           <p:nvPr/>
         </p:nvSpPr>
@@ -9628,7 +9628,7 @@
       </p:sp>
       <p:sp>
         <p:nvSpPr>
-          <p:cNvPr id="3" name="Oval 2"/>
+          <p:cNvPr id="3" name="deckgen:decor"/>
           <p:cNvSpPr/>
           <p:nvPr/>
         </p:nvSpPr>
@@ -9658,7 +9658,7 @@
       </p:sp>
       <p:sp>
         <p:nvSpPr>
-          <p:cNvPr id="4" name="Oval 3"/>
+          <p:cNvPr id="4" name="deckgen:decor"/>
           <p:cNvSpPr/>
           <p:nvPr/>
         </p:nvSpPr>
@@ -11155,7 +11155,7 @@
       <p:grpSpPr/>
       <p:sp>
         <p:nvSpPr>
-          <p:cNvPr id="2" name="Oval 1"/>
+          <p:cNvPr id="2" name="deckgen:decor"/>
           <p:cNvSpPr/>
           <p:nvPr/>
         </p:nvSpPr>
@@ -11185,7 +11185,7 @@
       </p:sp>
       <p:sp>
         <p:nvSpPr>
-          <p:cNvPr id="3" name="Oval 2"/>
+          <p:cNvPr id="3" name="deckgen:decor"/>
           <p:cNvSpPr/>
           <p:nvPr/>
         </p:nvSpPr>
@@ -11215,7 +11215,7 @@
       </p:sp>
       <p:sp>
         <p:nvSpPr>
-          <p:cNvPr id="4" name="Oval 3"/>
+          <p:cNvPr id="4" name="deckgen:decor"/>
           <p:cNvSpPr/>
           <p:nvPr/>
         </p:nvSpPr>
@@ -12712,7 +12712,7 @@
       <p:grpSpPr/>
       <p:sp>
         <p:nvSpPr>
-          <p:cNvPr id="2" name="Oval 1"/>
+          <p:cNvPr id="2" name="deckgen:decor"/>
           <p:cNvSpPr/>
           <p:nvPr/>
         </p:nvSpPr>
@@ -12742,7 +12742,7 @@
       </p:sp>
       <p:sp>
         <p:nvSpPr>
-          <p:cNvPr id="3" name="Oval 2"/>
+          <p:cNvPr id="3" name="deckgen:decor"/>
           <p:cNvSpPr/>
           <p:nvPr/>
         </p:nvSpPr>
@@ -12772,7 +12772,7 @@
       </p:sp>
       <p:sp>
         <p:nvSpPr>
-          <p:cNvPr id="4" name="Oval 3"/>
+          <p:cNvPr id="4" name="deckgen:decor"/>
           <p:cNvSpPr/>
           <p:nvPr/>
         </p:nvSpPr>
@@ -13739,7 +13739,7 @@
       <p:grpSpPr/>
       <p:sp>
         <p:nvSpPr>
-          <p:cNvPr id="2" name="Oval 1"/>
+          <p:cNvPr id="2" name="deckgen:decor"/>
           <p:cNvSpPr/>
           <p:nvPr/>
         </p:nvSpPr>
@@ -13769,7 +13769,7 @@
       </p:sp>
       <p:sp>
         <p:nvSpPr>
-          <p:cNvPr id="3" name="Oval 2"/>
+          <p:cNvPr id="3" name="deckgen:decor"/>
           <p:cNvSpPr/>
           <p:nvPr/>
         </p:nvSpPr>
@@ -13799,7 +13799,7 @@
       </p:sp>
       <p:sp>
         <p:nvSpPr>
-          <p:cNvPr id="4" name="Oval 3"/>
+          <p:cNvPr id="4" name="deckgen:decor"/>
           <p:cNvSpPr/>
           <p:nvPr/>
         </p:nvSpPr>
